--- a/deliverables/final/Presentation.pptx
+++ b/deliverables/final/Presentation.pptx
@@ -10,8 +10,7 @@
     <p:sldId id="258" r:id="rId4"/>
     <p:sldId id="261" r:id="rId5"/>
     <p:sldId id="263" r:id="rId6"/>
-    <p:sldId id="262" r:id="rId7"/>
-    <p:sldId id="260" r:id="rId8"/>
+    <p:sldId id="260" r:id="rId7"/>
   </p:sldIdLst>
   <p:sldSz cx="12192000" cy="6858000"/>
   <p:notesSz cx="6858000" cy="9144000"/>
@@ -282,7 +281,7 @@
           <a:p>
             <a:fld id="{6444479B-705B-4489-957E-7E8A228BDFA0}" type="datetime1">
               <a:rPr lang="en-US" smtClean="0"/>
-              <a:t>6/24/2025</a:t>
+              <a:t>6/30/25</a:t>
             </a:fld>
             <a:endParaRPr lang="en-US"/>
           </a:p>
@@ -336,7 +335,7 @@
           <a:p>
             <a:fld id="{70C12960-6E85-460F-B6E3-5B82CB31AF3D}" type="slidenum">
               <a:rPr lang="en-US" smtClean="0"/>
-              <a:t>‹N›</a:t>
+              <a:t>‹#›</a:t>
             </a:fld>
             <a:endParaRPr lang="en-US"/>
           </a:p>
@@ -482,7 +481,7 @@
           <a:p>
             <a:fld id="{C07B66AD-7C08-490A-ADA4-B47E10FB2407}" type="datetime1">
               <a:rPr lang="en-US" smtClean="0"/>
-              <a:t>6/24/2025</a:t>
+              <a:t>6/30/25</a:t>
             </a:fld>
             <a:endParaRPr lang="en-US"/>
           </a:p>
@@ -536,7 +535,7 @@
           <a:p>
             <a:fld id="{70C12960-6E85-460F-B6E3-5B82CB31AF3D}" type="slidenum">
               <a:rPr lang="en-US" smtClean="0"/>
-              <a:t>‹N›</a:t>
+              <a:t>‹#›</a:t>
             </a:fld>
             <a:endParaRPr lang="en-US"/>
           </a:p>
@@ -741,7 +740,7 @@
           <a:p>
             <a:fld id="{05B95027-4255-49E7-9841-CD21BCC99996}" type="datetime1">
               <a:rPr lang="en-US" smtClean="0"/>
-              <a:t>6/24/2025</a:t>
+              <a:t>6/30/25</a:t>
             </a:fld>
             <a:endParaRPr lang="en-US"/>
           </a:p>
@@ -795,7 +794,7 @@
           <a:p>
             <a:fld id="{70C12960-6E85-460F-B6E3-5B82CB31AF3D}" type="slidenum">
               <a:rPr lang="en-US" smtClean="0"/>
-              <a:t>‹N›</a:t>
+              <a:t>‹#›</a:t>
             </a:fld>
             <a:endParaRPr lang="en-US"/>
           </a:p>
@@ -982,7 +981,7 @@
           <a:p>
             <a:fld id="{9F89F774-3FA6-43B8-9241-99959C8FD463}" type="datetime1">
               <a:rPr lang="en-US" smtClean="0"/>
-              <a:t>6/24/2025</a:t>
+              <a:t>6/30/25</a:t>
             </a:fld>
             <a:endParaRPr lang="en-US"/>
           </a:p>
@@ -1036,7 +1035,7 @@
           <a:p>
             <a:fld id="{70C12960-6E85-460F-B6E3-5B82CB31AF3D}" type="slidenum">
               <a:rPr lang="en-US" smtClean="0"/>
-              <a:t>‹N›</a:t>
+              <a:t>‹#›</a:t>
             </a:fld>
             <a:endParaRPr lang="en-US"/>
           </a:p>
@@ -1309,7 +1308,7 @@
           <a:p>
             <a:fld id="{F9504452-5DCC-4FE2-A5C9-8A5EF6714D65}" type="datetime1">
               <a:rPr lang="en-US" smtClean="0"/>
-              <a:t>6/24/2025</a:t>
+              <a:t>6/30/25</a:t>
             </a:fld>
             <a:endParaRPr lang="en-US"/>
           </a:p>
@@ -1363,7 +1362,7 @@
           <a:p>
             <a:fld id="{70C12960-6E85-460F-B6E3-5B82CB31AF3D}" type="slidenum">
               <a:rPr lang="en-US" smtClean="0"/>
-              <a:t>‹N›</a:t>
+              <a:t>‹#›</a:t>
             </a:fld>
             <a:endParaRPr lang="en-US"/>
           </a:p>
@@ -1619,7 +1618,7 @@
           <a:p>
             <a:fld id="{E579ABC2-0180-4F3A-A895-A85BC724D472}" type="datetime1">
               <a:rPr lang="en-US" smtClean="0"/>
-              <a:t>6/24/2025</a:t>
+              <a:t>6/30/25</a:t>
             </a:fld>
             <a:endParaRPr lang="en-US"/>
           </a:p>
@@ -1673,7 +1672,7 @@
           <a:p>
             <a:fld id="{70C12960-6E85-460F-B6E3-5B82CB31AF3D}" type="slidenum">
               <a:rPr lang="en-US" smtClean="0"/>
-              <a:t>‹N›</a:t>
+              <a:t>‹#›</a:t>
             </a:fld>
             <a:endParaRPr lang="en-US"/>
           </a:p>
@@ -2037,7 +2036,7 @@
           <a:p>
             <a:fld id="{6AEEA9BA-4E8F-439E-BEA4-91FBA01E3F5F}" type="datetime1">
               <a:rPr lang="en-US" smtClean="0"/>
-              <a:t>6/24/2025</a:t>
+              <a:t>6/30/25</a:t>
             </a:fld>
             <a:endParaRPr lang="en-US"/>
           </a:p>
@@ -2091,7 +2090,7 @@
           <a:p>
             <a:fld id="{70C12960-6E85-460F-B6E3-5B82CB31AF3D}" type="slidenum">
               <a:rPr lang="en-US" smtClean="0"/>
-              <a:t>‹N›</a:t>
+              <a:t>‹#›</a:t>
             </a:fld>
             <a:endParaRPr lang="en-US"/>
           </a:p>
@@ -2179,7 +2178,7 @@
           <a:p>
             <a:fld id="{BE15BF18-0007-481C-AA29-413124BC3EE7}" type="datetime1">
               <a:rPr lang="en-US" smtClean="0"/>
-              <a:t>6/24/2025</a:t>
+              <a:t>6/30/25</a:t>
             </a:fld>
             <a:endParaRPr lang="en-US"/>
           </a:p>
@@ -2233,7 +2232,7 @@
           <a:p>
             <a:fld id="{70C12960-6E85-460F-B6E3-5B82CB31AF3D}" type="slidenum">
               <a:rPr lang="en-US" smtClean="0"/>
-              <a:t>‹N›</a:t>
+              <a:t>‹#›</a:t>
             </a:fld>
             <a:endParaRPr lang="en-US"/>
           </a:p>
@@ -2341,7 +2340,7 @@
           <a:p>
             <a:fld id="{09BE9870-3748-43AD-B547-02A075CB4A1D}" type="datetime1">
               <a:rPr lang="en-US" smtClean="0"/>
-              <a:t>6/24/2025</a:t>
+              <a:t>6/30/25</a:t>
             </a:fld>
             <a:endParaRPr lang="en-US"/>
           </a:p>
@@ -2395,7 +2394,7 @@
           <a:p>
             <a:fld id="{70C12960-6E85-460F-B6E3-5B82CB31AF3D}" type="slidenum">
               <a:rPr lang="en-US" smtClean="0"/>
-              <a:t>‹N›</a:t>
+              <a:t>‹#›</a:t>
             </a:fld>
             <a:endParaRPr lang="en-US"/>
           </a:p>
@@ -2658,7 +2657,7 @@
           <a:p>
             <a:fld id="{558E7897-33C5-4F1A-9307-D068E37F3DC7}" type="datetime1">
               <a:rPr lang="en-US" smtClean="0"/>
-              <a:t>6/24/2025</a:t>
+              <a:t>6/30/25</a:t>
             </a:fld>
             <a:endParaRPr lang="en-US"/>
           </a:p>
@@ -2712,7 +2711,7 @@
           <a:p>
             <a:fld id="{70C12960-6E85-460F-B6E3-5B82CB31AF3D}" type="slidenum">
               <a:rPr lang="en-US" smtClean="0"/>
-              <a:t>‹N›</a:t>
+              <a:t>‹#›</a:t>
             </a:fld>
             <a:endParaRPr lang="en-US"/>
           </a:p>
@@ -2953,7 +2952,7 @@
           <a:p>
             <a:fld id="{82E171BA-CC09-47C8-A6DF-F5C5CB59CEEC}" type="datetime1">
               <a:rPr lang="en-US" smtClean="0"/>
-              <a:t>6/24/2025</a:t>
+              <a:t>6/30/25</a:t>
             </a:fld>
             <a:endParaRPr lang="en-US"/>
           </a:p>
@@ -3007,7 +3006,7 @@
           <a:p>
             <a:fld id="{70C12960-6E85-460F-B6E3-5B82CB31AF3D}" type="slidenum">
               <a:rPr lang="en-US" smtClean="0"/>
-              <a:t>‹N›</a:t>
+              <a:t>‹#›</a:t>
             </a:fld>
             <a:endParaRPr lang="en-US"/>
           </a:p>
@@ -3194,7 +3193,7 @@
           <a:p>
             <a:fld id="{7DA38F49-B3E2-4BF0-BEC7-C30D34ABBB8D}" type="datetime1">
               <a:rPr lang="en-US" smtClean="0"/>
-              <a:t>6/24/2025</a:t>
+              <a:t>6/30/25</a:t>
             </a:fld>
             <a:endParaRPr lang="en-US"/>
           </a:p>
@@ -3280,7 +3279,7 @@
           <a:p>
             <a:fld id="{70C12960-6E85-460F-B6E3-5B82CB31AF3D}" type="slidenum">
               <a:rPr lang="en-US" smtClean="0"/>
-              <a:t>‹N›</a:t>
+              <a:t>‹#›</a:t>
             </a:fld>
             <a:endParaRPr lang="en-US"/>
           </a:p>
@@ -3911,10 +3910,10 @@
               <a:t>Alessandro </a:t>
             </a:r>
             <a:r>
-              <a:rPr lang="it-IT" u="sng"/>
+              <a:rPr lang="it-IT" dirty="0" err="1"/>
               <a:t>Nicolov</a:t>
             </a:r>
-            <a:endParaRPr lang="it-IT" u="sng" dirty="0"/>
+            <a:endParaRPr lang="it-IT" dirty="0"/>
           </a:p>
           <a:p>
             <a:pPr algn="r"/>
@@ -4086,27 +4085,7 @@
                 <a:latin typeface="Helvetica"/>
                 <a:cs typeface="Helvetica"/>
               </a:rPr>
-              <a:t>Il sistema garantisce: aderenza alle regole ufficiali del gioco, architettura modulare e scalabile, facilmente estendibile, </a:t>
-            </a:r>
-            <a:r>
-              <a:rPr lang="it-IT" sz="2400" dirty="0" err="1">
-                <a:solidFill>
-                  <a:srgbClr val="BCBEC4"/>
-                </a:solidFill>
-                <a:latin typeface="Helvetica"/>
-                <a:cs typeface="Helvetica"/>
-              </a:rPr>
-              <a:t>aaffidabilità</a:t>
-            </a:r>
-            <a:r>
-              <a:rPr lang="it-IT" sz="2400" dirty="0">
-                <a:solidFill>
-                  <a:srgbClr val="BCBEC4"/>
-                </a:solidFill>
-                <a:latin typeface="Helvetica"/>
-                <a:cs typeface="Helvetica"/>
-              </a:rPr>
-              <a:t> nella gestione della comunicazione di rete tra client e server</a:t>
+              <a:t>Il sistema garantisce: aderenza alle regole ufficiali del gioco, architettura modulare e scalabile, facilmente estendibile, affidabilità nella gestione della comunicazione di rete tra client e server</a:t>
             </a:r>
             <a:endParaRPr lang="it-IT" sz="2400" dirty="0">
               <a:solidFill>
@@ -4295,7 +4274,7 @@
                 <a:latin typeface="Helvetica"/>
                 <a:cs typeface="Helvetica"/>
               </a:rPr>
-              <a:t>Volo di Prova</a:t>
+              <a:t>Partite Multiple</a:t>
             </a:r>
             <a:r>
               <a:rPr lang="it-IT" sz="1400" dirty="0">
@@ -4305,7 +4284,197 @@
                 <a:latin typeface="Helvetica"/>
                 <a:cs typeface="Helvetica"/>
               </a:rPr>
-              <a:t>: modalità alternativa con plance e regole semplificate.</a:t>
+              <a:t>: il server può gestire più partite contemporaneamente</a:t>
+            </a:r>
+            <a:endParaRPr lang="it-IT" sz="1400" dirty="0"/>
+          </a:p>
+        </p:txBody>
+      </p:sp>
+      <p:sp>
+        <p:nvSpPr>
+          <p:cNvPr id="6" name="Text Placeholder 5">
+            <a:extLst>
+              <a:ext uri="{FF2B5EF4-FFF2-40B4-BE49-F238E27FC236}">
+                <a16:creationId xmlns:a16="http://schemas.microsoft.com/office/drawing/2014/main" id="{5E9F8FCA-AA58-286A-8D2F-ED8F92664C7A}"/>
+              </a:ext>
+            </a:extLst>
+          </p:cNvPr>
+          <p:cNvSpPr>
+            <a:spLocks noGrp="1"/>
+          </p:cNvSpPr>
+          <p:nvPr>
+            <p:ph type="body" sz="quarter" idx="3"/>
+          </p:nvPr>
+        </p:nvSpPr>
+        <p:spPr/>
+        <p:txBody>
+          <a:bodyPr/>
+          <a:lstStyle/>
+          <a:p>
+            <a:r>
+              <a:rPr lang="it-IT" dirty="0">
+                <a:latin typeface="Helvetica"/>
+                <a:cs typeface="Helvetica"/>
+              </a:rPr>
+              <a:t>Game-</a:t>
+            </a:r>
+            <a:r>
+              <a:rPr lang="it-IT" dirty="0" err="1">
+                <a:latin typeface="Helvetica"/>
+                <a:cs typeface="Helvetica"/>
+              </a:rPr>
+              <a:t>Agnostic</a:t>
+            </a:r>
+            <a:endParaRPr lang="it-IT" dirty="0"/>
+          </a:p>
+          <a:p>
+            <a:endParaRPr lang="it-IT" dirty="0"/>
+          </a:p>
+        </p:txBody>
+      </p:sp>
+      <p:sp>
+        <p:nvSpPr>
+          <p:cNvPr id="4" name="Content Placeholder 3">
+            <a:extLst>
+              <a:ext uri="{FF2B5EF4-FFF2-40B4-BE49-F238E27FC236}">
+                <a16:creationId xmlns:a16="http://schemas.microsoft.com/office/drawing/2014/main" id="{496648B1-CBD5-3A4C-664E-C1AD0CA5A016}"/>
+              </a:ext>
+            </a:extLst>
+          </p:cNvPr>
+          <p:cNvSpPr>
+            <a:spLocks noGrp="1"/>
+          </p:cNvSpPr>
+          <p:nvPr>
+            <p:ph sz="quarter" idx="4"/>
+          </p:nvPr>
+        </p:nvSpPr>
+        <p:spPr>
+          <a:xfrm>
+            <a:off x="6318927" y="2675168"/>
+            <a:ext cx="5678849" cy="4583588"/>
+          </a:xfrm>
+        </p:spPr>
+        <p:txBody>
+          <a:bodyPr vert="horz" lIns="91440" tIns="45720" rIns="91440" bIns="45720" rtlCol="0" anchor="t">
+            <a:noAutofit/>
+          </a:bodyPr>
+          <a:lstStyle/>
+          <a:p>
+            <a:pPr marL="0" indent="0">
+              <a:buNone/>
+            </a:pPr>
+            <a:r>
+              <a:rPr lang="it-IT" sz="1400" b="1" dirty="0">
+                <a:latin typeface="Helvetica"/>
+                <a:cs typeface="Helvetica"/>
+              </a:rPr>
+              <a:t>Architettura (MVC): </a:t>
+            </a:r>
+          </a:p>
+          <a:p>
+            <a:pPr marL="0" indent="0">
+              <a:buNone/>
+            </a:pPr>
+            <a:r>
+              <a:rPr lang="it-IT" sz="1400" b="1" dirty="0">
+                <a:latin typeface="Helvetica"/>
+                <a:cs typeface="Helvetica"/>
+              </a:rPr>
+              <a:t>Model</a:t>
+            </a:r>
+            <a:r>
+              <a:rPr lang="it-IT" sz="1400" dirty="0">
+                <a:solidFill>
+                  <a:srgbClr val="BCBEC4"/>
+                </a:solidFill>
+                <a:latin typeface="Helvetica"/>
+                <a:cs typeface="Helvetica"/>
+              </a:rPr>
+              <a:t>: contiene la logica di gioco, lo stato delle navi, la gestione delle carte e la validazione delle mosse</a:t>
+            </a:r>
+          </a:p>
+          <a:p>
+            <a:pPr marL="0" indent="0">
+              <a:buNone/>
+            </a:pPr>
+            <a:r>
+              <a:rPr lang="it-IT" sz="1400" b="1" dirty="0" err="1">
+                <a:latin typeface="Helvetica"/>
+                <a:cs typeface="Helvetica"/>
+              </a:rPr>
+              <a:t>View</a:t>
+            </a:r>
+            <a:r>
+              <a:rPr lang="it-IT" sz="1400" dirty="0">
+                <a:solidFill>
+                  <a:srgbClr val="BCBEC4"/>
+                </a:solidFill>
+                <a:latin typeface="Helvetica"/>
+                <a:cs typeface="Helvetica"/>
+              </a:rPr>
+              <a:t>: implementa sia la TUI che la GUI, mostrando lo stato aggiornato e ricevendo input dagli utenti</a:t>
+            </a:r>
+          </a:p>
+          <a:p>
+            <a:pPr marL="0" indent="0">
+              <a:buNone/>
+            </a:pPr>
+            <a:r>
+              <a:rPr lang="it-IT" sz="1400" b="1" dirty="0">
+                <a:latin typeface="Helvetica"/>
+                <a:cs typeface="Helvetica"/>
+              </a:rPr>
+              <a:t>Controller</a:t>
+            </a:r>
+            <a:r>
+              <a:rPr lang="it-IT" sz="1400" dirty="0">
+                <a:solidFill>
+                  <a:srgbClr val="BCBEC4"/>
+                </a:solidFill>
+                <a:latin typeface="Helvetica"/>
+                <a:cs typeface="Helvetica"/>
+              </a:rPr>
+              <a:t>: gestisce la logica di coordinamento tra Model e </a:t>
+            </a:r>
+            <a:r>
+              <a:rPr lang="it-IT" sz="1400" dirty="0" err="1">
+                <a:solidFill>
+                  <a:srgbClr val="BCBEC4"/>
+                </a:solidFill>
+                <a:latin typeface="Helvetica"/>
+                <a:cs typeface="Helvetica"/>
+              </a:rPr>
+              <a:t>View</a:t>
+            </a:r>
+            <a:r>
+              <a:rPr lang="it-IT" sz="1400" dirty="0">
+                <a:solidFill>
+                  <a:srgbClr val="BCBEC4"/>
+                </a:solidFill>
+                <a:latin typeface="Helvetica"/>
+                <a:cs typeface="Helvetica"/>
+              </a:rPr>
+              <a:t>, inoltra i comandi e si occupa della comunicazione </a:t>
+            </a:r>
+            <a:r>
+              <a:rPr lang="it-IT" sz="1400" dirty="0" err="1">
+                <a:solidFill>
+                  <a:srgbClr val="BCBEC4"/>
+                </a:solidFill>
+                <a:latin typeface="Helvetica"/>
+                <a:cs typeface="Helvetica"/>
+              </a:rPr>
+              <a:t>client-server</a:t>
+            </a:r>
+            <a:r>
+              <a:rPr lang="it-IT" sz="1400" dirty="0">
+                <a:solidFill>
+                  <a:srgbClr val="BCBEC4"/>
+                </a:solidFill>
+                <a:latin typeface="Helvetica"/>
+                <a:cs typeface="Helvetica"/>
+              </a:rPr>
+              <a:t>.</a:t>
             </a:r>
             <a:endParaRPr lang="it-IT" sz="1400" dirty="0">
               <a:latin typeface="Helvetica"/>
@@ -4313,13 +4482,31 @@
             </a:endParaRPr>
           </a:p>
           <a:p>
+            <a:pPr marL="0" indent="0">
+              <a:buNone/>
+            </a:pPr>
             <a:r>
               <a:rPr lang="it-IT" sz="1400" b="1" dirty="0">
                 <a:latin typeface="Helvetica"/>
                 <a:cs typeface="Helvetica"/>
               </a:rPr>
-              <a:t>Partite Multiple</a:t>
-            </a:r>
+              <a:t>Tecnologia Client-Server</a:t>
+            </a:r>
+            <a:r>
+              <a:rPr lang="it-IT" sz="1400" b="1" dirty="0">
+                <a:solidFill>
+                  <a:srgbClr val="BCBEC4"/>
+                </a:solidFill>
+                <a:latin typeface="Helvetica"/>
+                <a:cs typeface="Helvetica"/>
+              </a:rPr>
+              <a:t>: </a:t>
+            </a:r>
+          </a:p>
+          <a:p>
+            <a:pPr marL="0" indent="0">
+              <a:buNone/>
+            </a:pPr>
             <a:r>
               <a:rPr lang="it-IT" sz="1400" dirty="0">
                 <a:solidFill>
@@ -4328,120 +4515,34 @@
                 <a:latin typeface="Helvetica"/>
                 <a:cs typeface="Helvetica"/>
               </a:rPr>
-              <a:t>: il server può gestire più partite contemporaneamente</a:t>
-            </a:r>
-            <a:endParaRPr lang="it-IT" sz="1400" dirty="0"/>
-          </a:p>
-        </p:txBody>
-      </p:sp>
-      <p:sp>
-        <p:nvSpPr>
-          <p:cNvPr id="6" name="Text Placeholder 5">
-            <a:extLst>
-              <a:ext uri="{FF2B5EF4-FFF2-40B4-BE49-F238E27FC236}">
-                <a16:creationId xmlns:a16="http://schemas.microsoft.com/office/drawing/2014/main" id="{5E9F8FCA-AA58-286A-8D2F-ED8F92664C7A}"/>
-              </a:ext>
-            </a:extLst>
-          </p:cNvPr>
-          <p:cNvSpPr>
-            <a:spLocks noGrp="1"/>
-          </p:cNvSpPr>
-          <p:nvPr>
-            <p:ph type="body" sz="quarter" idx="3"/>
-          </p:nvPr>
-        </p:nvSpPr>
-        <p:spPr/>
-        <p:txBody>
-          <a:bodyPr/>
-          <a:lstStyle/>
-          <a:p>
-            <a:r>
-              <a:rPr lang="it-IT" dirty="0">
-                <a:latin typeface="Helvetica"/>
-                <a:cs typeface="Helvetica"/>
-              </a:rPr>
-              <a:t>Game-</a:t>
-            </a:r>
-            <a:r>
-              <a:rPr lang="it-IT" dirty="0" err="1">
-                <a:latin typeface="Helvetica"/>
-                <a:cs typeface="Helvetica"/>
-              </a:rPr>
-              <a:t>Agnostic</a:t>
-            </a:r>
-            <a:endParaRPr lang="it-IT" dirty="0"/>
-          </a:p>
-          <a:p>
-            <a:endParaRPr lang="it-IT" dirty="0"/>
-          </a:p>
-        </p:txBody>
-      </p:sp>
-      <p:sp>
-        <p:nvSpPr>
-          <p:cNvPr id="4" name="Content Placeholder 3">
-            <a:extLst>
-              <a:ext uri="{FF2B5EF4-FFF2-40B4-BE49-F238E27FC236}">
-                <a16:creationId xmlns:a16="http://schemas.microsoft.com/office/drawing/2014/main" id="{496648B1-CBD5-3A4C-664E-C1AD0CA5A016}"/>
-              </a:ext>
-            </a:extLst>
-          </p:cNvPr>
-          <p:cNvSpPr>
-            <a:spLocks noGrp="1"/>
-          </p:cNvSpPr>
-          <p:nvPr>
-            <p:ph sz="quarter" idx="4"/>
-          </p:nvPr>
-        </p:nvSpPr>
-        <p:spPr>
-          <a:xfrm>
-            <a:off x="6318928" y="2675168"/>
-            <a:ext cx="5212080" cy="3522813"/>
-          </a:xfrm>
-        </p:spPr>
-        <p:txBody>
-          <a:bodyPr vert="horz" lIns="91440" tIns="45720" rIns="91440" bIns="45720" rtlCol="0" anchor="t">
-            <a:noAutofit/>
-          </a:bodyPr>
-          <a:lstStyle/>
-          <a:p>
-            <a:pPr marL="0" indent="0">
-              <a:buNone/>
-            </a:pPr>
-            <a:r>
-              <a:rPr lang="it-IT" sz="1400" b="1" dirty="0">
-                <a:latin typeface="Helvetica"/>
-                <a:cs typeface="Helvetica"/>
-              </a:rPr>
-              <a:t>Architettura (MVC): </a:t>
-            </a:r>
-          </a:p>
-          <a:p>
-            <a:pPr marL="0" indent="0">
-              <a:buNone/>
-            </a:pPr>
-            <a:r>
-              <a:rPr lang="it-IT" sz="1400" b="1" dirty="0">
-                <a:latin typeface="Helvetica"/>
-                <a:cs typeface="Helvetica"/>
-              </a:rPr>
-              <a:t>Model</a:t>
+              <a:t>L’applicazione supporta due modalità di comunicazione </a:t>
             </a:r>
             <a:r>
               <a:rPr lang="it-IT" sz="1400" dirty="0">
+                <a:latin typeface="Helvetica"/>
+                <a:cs typeface="Helvetica"/>
+              </a:rPr>
+              <a:t>TCP/IP </a:t>
+            </a:r>
+            <a:r>
+              <a:rPr lang="it-IT" sz="1400" dirty="0">
                 <a:solidFill>
                   <a:srgbClr val="BCBEC4"/>
                 </a:solidFill>
                 <a:latin typeface="Helvetica"/>
                 <a:cs typeface="Helvetica"/>
               </a:rPr>
-              <a:t>: contiene la logica di gioco, lo stato delle navi, la gestione delle carte e la validazione delle mosse, </a:t>
-            </a:r>
-            <a:r>
-              <a:rPr lang="it-IT" sz="1400" b="1" dirty="0" err="1">
-                <a:latin typeface="Helvetica"/>
-                <a:cs typeface="Helvetica"/>
-              </a:rPr>
-              <a:t>View</a:t>
+              <a:t>tramite </a:t>
+            </a:r>
+            <a:r>
+              <a:rPr lang="it-IT" sz="1400" dirty="0" err="1">
+                <a:solidFill>
+                  <a:srgbClr val="BCBEC4"/>
+                </a:solidFill>
+                <a:latin typeface="Helvetica"/>
+                <a:cs typeface="Helvetica"/>
+              </a:rPr>
+              <a:t>Socket</a:t>
             </a:r>
             <a:r>
               <a:rPr lang="it-IT" sz="1400" dirty="0">
@@ -4451,179 +4552,24 @@
                 <a:latin typeface="Helvetica"/>
                 <a:cs typeface="Helvetica"/>
               </a:rPr>
-              <a:t>: implementa sia la TUI che la GUI, mostrando lo stato aggiornato e ricevendo input dagli utenti, </a:t>
-            </a:r>
-            <a:r>
-              <a:rPr lang="it-IT" sz="1400" b="1" dirty="0">
-                <a:latin typeface="Helvetica"/>
-                <a:cs typeface="Helvetica"/>
-              </a:rPr>
-              <a:t>Controller</a:t>
+              <a:t> ed </a:t>
             </a:r>
             <a:r>
               <a:rPr lang="it-IT" sz="1400" dirty="0">
+                <a:latin typeface="Helvetica"/>
+                <a:cs typeface="Helvetica"/>
+              </a:rPr>
+              <a:t>RMI</a:t>
+            </a:r>
+            <a:r>
+              <a:rPr lang="it-IT" sz="1400" dirty="0">
                 <a:solidFill>
                   <a:srgbClr val="BCBEC4"/>
                 </a:solidFill>
                 <a:latin typeface="Helvetica"/>
                 <a:cs typeface="Helvetica"/>
               </a:rPr>
-              <a:t>: gestisce la logica di coordinamento tra Model e </a:t>
-            </a:r>
-            <a:r>
-              <a:rPr lang="it-IT" sz="1400" dirty="0" err="1">
-                <a:solidFill>
-                  <a:srgbClr val="BCBEC4"/>
-                </a:solidFill>
-                <a:latin typeface="Helvetica"/>
-                <a:cs typeface="Helvetica"/>
-              </a:rPr>
-              <a:t>View</a:t>
-            </a:r>
-            <a:r>
-              <a:rPr lang="it-IT" sz="1400" dirty="0">
-                <a:solidFill>
-                  <a:srgbClr val="BCBEC4"/>
-                </a:solidFill>
-                <a:latin typeface="Helvetica"/>
-                <a:cs typeface="Helvetica"/>
-              </a:rPr>
-              <a:t>, inoltra i comandi e si occupa della comunicazione </a:t>
-            </a:r>
-            <a:r>
-              <a:rPr lang="it-IT" sz="1400" dirty="0" err="1">
-                <a:solidFill>
-                  <a:srgbClr val="BCBEC4"/>
-                </a:solidFill>
-                <a:latin typeface="Helvetica"/>
-                <a:cs typeface="Helvetica"/>
-              </a:rPr>
-              <a:t>client-server</a:t>
-            </a:r>
-            <a:r>
-              <a:rPr lang="it-IT" sz="1400" dirty="0">
-                <a:solidFill>
-                  <a:srgbClr val="BCBEC4"/>
-                </a:solidFill>
-                <a:latin typeface="Helvetica"/>
-                <a:cs typeface="Helvetica"/>
-              </a:rPr>
-              <a:t>.</a:t>
-            </a:r>
-            <a:endParaRPr lang="it-IT" sz="1400" dirty="0">
-              <a:latin typeface="Helvetica"/>
-              <a:cs typeface="Helvetica"/>
-            </a:endParaRPr>
-          </a:p>
-          <a:p>
-            <a:pPr marL="0" indent="0">
-              <a:buNone/>
-            </a:pPr>
-            <a:r>
-              <a:rPr lang="it-IT" sz="1400" b="1" dirty="0">
-                <a:latin typeface="Helvetica"/>
-                <a:cs typeface="Helvetica"/>
-              </a:rPr>
-              <a:t>Tecnologia Client-Server</a:t>
-            </a:r>
-            <a:r>
-              <a:rPr lang="it-IT" sz="1400" b="1" dirty="0">
-                <a:solidFill>
-                  <a:srgbClr val="BCBEC4"/>
-                </a:solidFill>
-                <a:latin typeface="Helvetica"/>
-                <a:cs typeface="Helvetica"/>
-              </a:rPr>
-              <a:t>: </a:t>
-            </a:r>
-          </a:p>
-          <a:p>
-            <a:pPr marL="0" indent="0">
-              <a:buNone/>
-            </a:pPr>
-            <a:r>
-              <a:rPr lang="it-IT" sz="1400" dirty="0">
-                <a:solidFill>
-                  <a:srgbClr val="BCBEC4"/>
-                </a:solidFill>
-                <a:latin typeface="Helvetica"/>
-                <a:cs typeface="Helvetica"/>
-              </a:rPr>
-              <a:t>L’applicazione supporta due modalità di comunicazione </a:t>
-            </a:r>
-            <a:r>
-              <a:rPr lang="it-IT" sz="1400" dirty="0">
-                <a:latin typeface="Helvetica"/>
-                <a:cs typeface="Helvetica"/>
-              </a:rPr>
-              <a:t>TCP/IP </a:t>
-            </a:r>
-            <a:r>
-              <a:rPr lang="it-IT" sz="1400" dirty="0">
-                <a:solidFill>
-                  <a:srgbClr val="BCBEC4"/>
-                </a:solidFill>
-                <a:latin typeface="Helvetica"/>
-                <a:cs typeface="Helvetica"/>
-              </a:rPr>
-              <a:t>tramite </a:t>
-            </a:r>
-            <a:r>
-              <a:rPr lang="it-IT" sz="1400" dirty="0" err="1">
-                <a:solidFill>
-                  <a:srgbClr val="BCBEC4"/>
-                </a:solidFill>
-                <a:latin typeface="Helvetica"/>
-                <a:cs typeface="Helvetica"/>
-              </a:rPr>
-              <a:t>Socket</a:t>
-            </a:r>
-            <a:r>
-              <a:rPr lang="it-IT" sz="1400" dirty="0">
-                <a:solidFill>
-                  <a:srgbClr val="BCBEC4"/>
-                </a:solidFill>
-                <a:latin typeface="Helvetica"/>
-                <a:cs typeface="Helvetica"/>
-              </a:rPr>
-              <a:t> ed </a:t>
-            </a:r>
-            <a:r>
-              <a:rPr lang="it-IT" sz="1400" dirty="0">
-                <a:latin typeface="Helvetica"/>
-                <a:cs typeface="Helvetica"/>
-              </a:rPr>
-              <a:t>RMI</a:t>
-            </a:r>
-            <a:r>
-              <a:rPr lang="it-IT" sz="1400" dirty="0">
-                <a:solidFill>
-                  <a:srgbClr val="BCBEC4"/>
-                </a:solidFill>
-                <a:latin typeface="Helvetica"/>
-                <a:cs typeface="Helvetica"/>
-              </a:rPr>
-              <a:t>, La scelta della modalità avviene all’avvio dell’applicazione, a discrezione dell’</a:t>
-            </a:r>
-            <a:r>
-              <a:rPr lang="it-IT" sz="1400" dirty="0" err="1">
-                <a:solidFill>
-                  <a:srgbClr val="BCBEC4"/>
-                </a:solidFill>
-                <a:latin typeface="Helvetica"/>
-                <a:cs typeface="Helvetica"/>
-              </a:rPr>
-              <a:t>utente.Tutti</a:t>
-            </a:r>
-            <a:r>
-              <a:rPr lang="it-IT" sz="1400" dirty="0">
-                <a:solidFill>
-                  <a:srgbClr val="BCBEC4"/>
-                </a:solidFill>
-                <a:latin typeface="Helvetica"/>
-                <a:cs typeface="Helvetica"/>
-              </a:rPr>
-              <a:t> i dati scambiati tra client e server sono rappresentati tramite oggetti Java serializzabili, permettendo il trasferimento sicuro e tipizzato delle informazioni.</a:t>
+              <a:t>, La scelta della modalità avviene all’avvio dell’applicazione, a discrezione dell’utente. Tutti i dati scambiati tra client e server sono rappresentati tramite oggetti Java serializzabili, permettendo il trasferimento sicuro e tipizzato delle informazioni.</a:t>
             </a:r>
             <a:endParaRPr lang="it-IT" sz="1400" dirty="0"/>
           </a:p>
@@ -5634,111 +5580,6 @@
 <file path=ppt/slides/slide6.xml><?xml version="1.0" encoding="utf-8"?>
 <p:sld xmlns:a="http://schemas.openxmlformats.org/drawingml/2006/main" xmlns:r="http://schemas.openxmlformats.org/officeDocument/2006/relationships" xmlns:p="http://schemas.openxmlformats.org/presentationml/2006/main">
   <p:cSld>
-    <p:spTree>
-      <p:nvGrpSpPr>
-        <p:cNvPr id="1" name=""/>
-        <p:cNvGrpSpPr/>
-        <p:nvPr/>
-      </p:nvGrpSpPr>
-      <p:grpSpPr>
-        <a:xfrm>
-          <a:off x="0" y="0"/>
-          <a:ext cx="0" cy="0"/>
-          <a:chOff x="0" y="0"/>
-          <a:chExt cx="0" cy="0"/>
-        </a:xfrm>
-      </p:grpSpPr>
-      <p:sp>
-        <p:nvSpPr>
-          <p:cNvPr id="2" name="Titolo 1">
-            <a:extLst>
-              <a:ext uri="{FF2B5EF4-FFF2-40B4-BE49-F238E27FC236}">
-                <a16:creationId xmlns:a16="http://schemas.microsoft.com/office/drawing/2014/main" id="{645DA771-7B1F-3F5A-1DDA-C2A7D004E49E}"/>
-              </a:ext>
-            </a:extLst>
-          </p:cNvPr>
-          <p:cNvSpPr>
-            <a:spLocks noGrp="1"/>
-          </p:cNvSpPr>
-          <p:nvPr>
-            <p:ph type="title"/>
-          </p:nvPr>
-        </p:nvSpPr>
-        <p:spPr/>
-        <p:txBody>
-          <a:bodyPr/>
-          <a:lstStyle/>
-          <a:p>
-            <a:endParaRPr lang="it-IT"/>
-          </a:p>
-        </p:txBody>
-      </p:sp>
-      <p:sp>
-        <p:nvSpPr>
-          <p:cNvPr id="3" name="Segnaposto contenuto 2">
-            <a:extLst>
-              <a:ext uri="{FF2B5EF4-FFF2-40B4-BE49-F238E27FC236}">
-                <a16:creationId xmlns:a16="http://schemas.microsoft.com/office/drawing/2014/main" id="{6AEF2C87-F011-F4CD-CA6D-6B5B96F3BD1A}"/>
-              </a:ext>
-            </a:extLst>
-          </p:cNvPr>
-          <p:cNvSpPr>
-            <a:spLocks noGrp="1"/>
-          </p:cNvSpPr>
-          <p:nvPr>
-            <p:ph sz="half" idx="1"/>
-          </p:nvPr>
-        </p:nvSpPr>
-        <p:spPr/>
-        <p:txBody>
-          <a:bodyPr/>
-          <a:lstStyle/>
-          <a:p>
-            <a:endParaRPr lang="it-IT"/>
-          </a:p>
-        </p:txBody>
-      </p:sp>
-      <p:sp>
-        <p:nvSpPr>
-          <p:cNvPr id="4" name="Segnaposto contenuto 3">
-            <a:extLst>
-              <a:ext uri="{FF2B5EF4-FFF2-40B4-BE49-F238E27FC236}">
-                <a16:creationId xmlns:a16="http://schemas.microsoft.com/office/drawing/2014/main" id="{68D51624-89FF-0FD7-1E03-839939C14E01}"/>
-              </a:ext>
-            </a:extLst>
-          </p:cNvPr>
-          <p:cNvSpPr>
-            <a:spLocks noGrp="1"/>
-          </p:cNvSpPr>
-          <p:nvPr>
-            <p:ph sz="half" idx="2"/>
-          </p:nvPr>
-        </p:nvSpPr>
-        <p:spPr/>
-        <p:txBody>
-          <a:bodyPr/>
-          <a:lstStyle/>
-          <a:p>
-            <a:endParaRPr lang="it-IT"/>
-          </a:p>
-        </p:txBody>
-      </p:sp>
-    </p:spTree>
-    <p:extLst>
-      <p:ext uri="{BB962C8B-B14F-4D97-AF65-F5344CB8AC3E}">
-        <p14:creationId xmlns:p14="http://schemas.microsoft.com/office/powerpoint/2010/main" val="868218718"/>
-      </p:ext>
-    </p:extLst>
-  </p:cSld>
-  <p:clrMapOvr>
-    <a:masterClrMapping/>
-  </p:clrMapOvr>
-</p:sld>
-</file>
-
-<file path=ppt/slides/slide7.xml><?xml version="1.0" encoding="utf-8"?>
-<p:sld xmlns:a="http://schemas.openxmlformats.org/drawingml/2006/main" xmlns:r="http://schemas.openxmlformats.org/officeDocument/2006/relationships" xmlns:p="http://schemas.openxmlformats.org/presentationml/2006/main">
-  <p:cSld>
     <p:bg>
       <p:bgPr>
         <a:solidFill>
@@ -5866,13 +5707,13 @@
           <a:lstStyle/>
           <a:p>
             <a:r>
-              <a:rPr lang="it-IT">
+              <a:rPr lang="it-IT" dirty="0">
                 <a:latin typeface="Helvetica"/>
                 <a:cs typeface="Helvetica"/>
               </a:rPr>
               <a:t>CONCLUSIONI</a:t>
             </a:r>
-            <a:endParaRPr lang="it-IT"/>
+            <a:endParaRPr lang="it-IT" dirty="0"/>
           </a:p>
           <a:p>
             <a:endParaRPr lang="it-IT" dirty="0"/>
